--- a/바로바스/output/DB-4000_부품안내카드.pptx
+++ b/바로바스/output/DB-4000_부품안내카드.pptx
@@ -126,7 +126,7 @@
   <p:extLst>
     <p:ext uri="{521415D9-36F7-43E2-AB2F-B90AF26B5E84}">
       <p14:sectionLst xmlns:p14="http://schemas.microsoft.com/office/powerpoint/2010/main">
-        <p14:section name="전체 영상" id="{bfc86015-895b-ef55-203e-664183f6af31}">
+        <p14:section name="전체 영상" id="{35452ca5-bdf8-c7c2-f6f6-db6f4e61bb96}">
           <p14:sldIdLst>
             <p14:sldId id="256"/>
             <p14:sldId id="257"/>
@@ -141,7 +141,7 @@
             <p14:sldId id="266"/>
           </p14:sldIdLst>
         </p14:section>
-        <p14:section name="부품별 단독 영상" id="{e61f6160-00a9-efa1-2115-87973e8a8f30}">
+        <p14:section name="부품별 단독 영상" id="{1439f02a-119a-5457-8ef3-64af40548966}">
           <p14:sldIdLst>
             <p14:sldId id="267"/>
             <p14:sldId id="268"/>
@@ -2346,6 +2346,30 @@
           <a:chExt cx="0" cy="0"/>
         </a:xfrm>
       </p:grpSpPr>
+      <p:pic>
+        <p:nvPicPr>
+          <p:cNvPr id="2" name="Image 0" descr="/home/user/claude-blog-project/바로바스/assets/logo_color.png">    </p:cNvPr>
+          <p:cNvPicPr>
+            <a:picLocks noChangeAspect="1"/>
+          </p:cNvPicPr>
+          <p:nvPr/>
+        </p:nvPicPr>
+        <p:blipFill>
+          <a:blip r:embed="rId1"/>
+          <a:stretch>
+            <a:fillRect/>
+          </a:stretch>
+        </p:blipFill>
+        <p:spPr>
+          <a:xfrm>
+            <a:off x="7808062" y="261518"/>
+            <a:ext cx="1053389" cy="331013"/>
+          </a:xfrm>
+          <a:prstGeom prst="rect">
+            <a:avLst/>
+          </a:prstGeom>
+        </p:spPr>
+      </p:pic>
     </p:spTree>
   </p:cSld>
   <p:clrMapOvr>
@@ -2378,6 +2402,30 @@
           <a:chExt cx="0" cy="0"/>
         </a:xfrm>
       </p:grpSpPr>
+      <p:pic>
+        <p:nvPicPr>
+          <p:cNvPr id="2" name="Image 0" descr="/home/user/claude-blog-project/바로바스/assets/logo_white.png">    </p:cNvPr>
+          <p:cNvPicPr>
+            <a:picLocks noChangeAspect="1"/>
+          </p:cNvPicPr>
+          <p:nvPr/>
+        </p:nvPicPr>
+        <p:blipFill>
+          <a:blip r:embed="rId1"/>
+          <a:stretch>
+            <a:fillRect/>
+          </a:stretch>
+        </p:blipFill>
+        <p:spPr>
+          <a:xfrm>
+            <a:off x="7808062" y="261518"/>
+            <a:ext cx="1053389" cy="331013"/>
+          </a:xfrm>
+          <a:prstGeom prst="rect">
+            <a:avLst/>
+          </a:prstGeom>
+        </p:spPr>
+      </p:pic>
     </p:spTree>
   </p:cSld>
   <p:clrMapOvr>
@@ -3662,12 +3710,12 @@
         </p:nvSpPr>
         <p:spPr>
           <a:xfrm>
-            <a:off x="5349240" y="457200"/>
-            <a:ext cx="3291840" cy="1965960"/>
+            <a:off x="5349240" y="868680"/>
+            <a:ext cx="3291840" cy="1828800"/>
           </a:xfrm>
           <a:prstGeom prst="roundRect">
             <a:avLst>
-              <a:gd name="adj" fmla="val 5581"/>
+              <a:gd name="adj" fmla="val 6000"/>
             </a:avLst>
           </a:prstGeom>
           <a:solidFill>
@@ -3697,7 +3745,7 @@
         </p:blipFill>
         <p:spPr>
           <a:xfrm>
-            <a:off x="6766560" y="1065276"/>
+            <a:off x="6766560" y="1408176"/>
             <a:ext cx="457200" cy="457200"/>
           </a:xfrm>
           <a:prstGeom prst="rect">
@@ -3713,7 +3761,7 @@
         </p:nvSpPr>
         <p:spPr>
           <a:xfrm>
-            <a:off x="5440680" y="1559052"/>
+            <a:off x="5440680" y="1901952"/>
             <a:ext cx="3108960" cy="256032"/>
           </a:xfrm>
           <a:prstGeom prst="rect">
@@ -3749,12 +3797,12 @@
         </p:nvSpPr>
         <p:spPr>
           <a:xfrm>
-            <a:off x="5349240" y="2560320"/>
-            <a:ext cx="3291840" cy="1965960"/>
+            <a:off x="5349240" y="2834640"/>
+            <a:ext cx="3291840" cy="1828800"/>
           </a:xfrm>
           <a:prstGeom prst="roundRect">
             <a:avLst>
-              <a:gd name="adj" fmla="val 5581"/>
+              <a:gd name="adj" fmla="val 6000"/>
             </a:avLst>
           </a:prstGeom>
           <a:solidFill>
@@ -3784,7 +3832,7 @@
         </p:blipFill>
         <p:spPr>
           <a:xfrm>
-            <a:off x="6766560" y="3168396"/>
+            <a:off x="6766560" y="3374136"/>
             <a:ext cx="457200" cy="457200"/>
           </a:xfrm>
           <a:prstGeom prst="rect">
@@ -3800,7 +3848,7 @@
         </p:nvSpPr>
         <p:spPr>
           <a:xfrm>
-            <a:off x="5440680" y="3662172"/>
+            <a:off x="5440680" y="3867912"/>
             <a:ext cx="3108960" cy="256032"/>
           </a:xfrm>
           <a:prstGeom prst="rect">
@@ -4357,8 +4405,8 @@
         </p:nvSpPr>
         <p:spPr>
           <a:xfrm>
-            <a:off x="5852160" y="365760"/>
-            <a:ext cx="2834640" cy="4480560"/>
+            <a:off x="5852160" y="868680"/>
+            <a:ext cx="2834640" cy="3931920"/>
           </a:xfrm>
           <a:prstGeom prst="roundRect">
             <a:avLst>
@@ -4392,7 +4440,7 @@
         </p:blipFill>
         <p:spPr>
           <a:xfrm>
-            <a:off x="7040880" y="2231136"/>
+            <a:off x="7040880" y="2459736"/>
             <a:ext cx="457200" cy="457200"/>
           </a:xfrm>
           <a:prstGeom prst="rect">
@@ -4408,7 +4456,7 @@
         </p:nvSpPr>
         <p:spPr>
           <a:xfrm>
-            <a:off x="5943600" y="2724912"/>
+            <a:off x="5943600" y="2953512"/>
             <a:ext cx="2651760" cy="256032"/>
           </a:xfrm>
           <a:prstGeom prst="rect">
@@ -4755,8 +4803,8 @@
         </p:nvSpPr>
         <p:spPr>
           <a:xfrm>
-            <a:off x="5349240" y="457200"/>
-            <a:ext cx="3291840" cy="4069080"/>
+            <a:off x="5349240" y="868680"/>
+            <a:ext cx="3291840" cy="3657600"/>
           </a:xfrm>
           <a:prstGeom prst="roundRect">
             <a:avLst>
@@ -4790,7 +4838,7 @@
         </p:blipFill>
         <p:spPr>
           <a:xfrm>
-            <a:off x="6766560" y="2116836"/>
+            <a:off x="6766560" y="2322576"/>
             <a:ext cx="457200" cy="457200"/>
           </a:xfrm>
           <a:prstGeom prst="rect">
@@ -4806,7 +4854,7 @@
         </p:nvSpPr>
         <p:spPr>
           <a:xfrm>
-            <a:off x="5440680" y="2610612"/>
+            <a:off x="5440680" y="2816352"/>
             <a:ext cx="3108960" cy="256032"/>
           </a:xfrm>
           <a:prstGeom prst="rect">
@@ -5093,8 +5141,8 @@
         </p:nvSpPr>
         <p:spPr>
           <a:xfrm>
-            <a:off x="5349240" y="457200"/>
-            <a:ext cx="3291840" cy="4069080"/>
+            <a:off x="5349240" y="868680"/>
+            <a:ext cx="3291840" cy="3657600"/>
           </a:xfrm>
           <a:prstGeom prst="roundRect">
             <a:avLst>
@@ -5128,7 +5176,7 @@
         </p:blipFill>
         <p:spPr>
           <a:xfrm>
-            <a:off x="6766560" y="2116836"/>
+            <a:off x="6766560" y="2322576"/>
             <a:ext cx="457200" cy="457200"/>
           </a:xfrm>
           <a:prstGeom prst="rect">
@@ -5144,7 +5192,7 @@
         </p:nvSpPr>
         <p:spPr>
           <a:xfrm>
-            <a:off x="5440680" y="2610612"/>
+            <a:off x="5440680" y="2816352"/>
             <a:ext cx="3108960" cy="256032"/>
           </a:xfrm>
           <a:prstGeom prst="rect">
@@ -5431,8 +5479,8 @@
         </p:nvSpPr>
         <p:spPr>
           <a:xfrm>
-            <a:off x="5349240" y="457200"/>
-            <a:ext cx="3291840" cy="4069080"/>
+            <a:off x="5349240" y="868680"/>
+            <a:ext cx="3291840" cy="3657600"/>
           </a:xfrm>
           <a:prstGeom prst="roundRect">
             <a:avLst>
@@ -5466,7 +5514,7 @@
         </p:blipFill>
         <p:spPr>
           <a:xfrm>
-            <a:off x="6766560" y="2116836"/>
+            <a:off x="6766560" y="2322576"/>
             <a:ext cx="457200" cy="457200"/>
           </a:xfrm>
           <a:prstGeom prst="rect">
@@ -5482,7 +5530,7 @@
         </p:nvSpPr>
         <p:spPr>
           <a:xfrm>
-            <a:off x="5440680" y="2610612"/>
+            <a:off x="5440680" y="2816352"/>
             <a:ext cx="3108960" cy="256032"/>
           </a:xfrm>
           <a:prstGeom prst="rect">
@@ -5769,8 +5817,8 @@
         </p:nvSpPr>
         <p:spPr>
           <a:xfrm>
-            <a:off x="5349240" y="457200"/>
-            <a:ext cx="3291840" cy="4069080"/>
+            <a:off x="5349240" y="868680"/>
+            <a:ext cx="3291840" cy="3657600"/>
           </a:xfrm>
           <a:prstGeom prst="roundRect">
             <a:avLst>
@@ -5804,7 +5852,7 @@
         </p:blipFill>
         <p:spPr>
           <a:xfrm>
-            <a:off x="6766560" y="2116836"/>
+            <a:off x="6766560" y="2322576"/>
             <a:ext cx="457200" cy="457200"/>
           </a:xfrm>
           <a:prstGeom prst="rect">
@@ -5820,7 +5868,7 @@
         </p:nvSpPr>
         <p:spPr>
           <a:xfrm>
-            <a:off x="5440680" y="2610612"/>
+            <a:off x="5440680" y="2816352"/>
             <a:ext cx="3108960" cy="256032"/>
           </a:xfrm>
           <a:prstGeom prst="rect">
@@ -6107,8 +6155,8 @@
         </p:nvSpPr>
         <p:spPr>
           <a:xfrm>
-            <a:off x="5349240" y="457200"/>
-            <a:ext cx="3291840" cy="4069080"/>
+            <a:off x="5349240" y="868680"/>
+            <a:ext cx="3291840" cy="3657600"/>
           </a:xfrm>
           <a:prstGeom prst="roundRect">
             <a:avLst>
@@ -6142,7 +6190,7 @@
         </p:blipFill>
         <p:spPr>
           <a:xfrm>
-            <a:off x="6766560" y="2116836"/>
+            <a:off x="6766560" y="2322576"/>
             <a:ext cx="457200" cy="457200"/>
           </a:xfrm>
           <a:prstGeom prst="rect">
@@ -6158,7 +6206,7 @@
         </p:nvSpPr>
         <p:spPr>
           <a:xfrm>
-            <a:off x="5440680" y="2610612"/>
+            <a:off x="5440680" y="2816352"/>
             <a:ext cx="3108960" cy="256032"/>
           </a:xfrm>
           <a:prstGeom prst="rect">
@@ -6445,8 +6493,8 @@
         </p:nvSpPr>
         <p:spPr>
           <a:xfrm>
-            <a:off x="5349240" y="457200"/>
-            <a:ext cx="3291840" cy="4069080"/>
+            <a:off x="5349240" y="868680"/>
+            <a:ext cx="3291840" cy="3657600"/>
           </a:xfrm>
           <a:prstGeom prst="roundRect">
             <a:avLst>
@@ -6480,7 +6528,7 @@
         </p:blipFill>
         <p:spPr>
           <a:xfrm>
-            <a:off x="6766560" y="2116836"/>
+            <a:off x="6766560" y="2322576"/>
             <a:ext cx="457200" cy="457200"/>
           </a:xfrm>
           <a:prstGeom prst="rect">
@@ -6496,7 +6544,7 @@
         </p:nvSpPr>
         <p:spPr>
           <a:xfrm>
-            <a:off x="5440680" y="2610612"/>
+            <a:off x="5440680" y="2816352"/>
             <a:ext cx="3108960" cy="256032"/>
           </a:xfrm>
           <a:prstGeom prst="rect">
@@ -6783,8 +6831,8 @@
         </p:nvSpPr>
         <p:spPr>
           <a:xfrm>
-            <a:off x="5349240" y="457200"/>
-            <a:ext cx="3291840" cy="4069080"/>
+            <a:off x="5349240" y="868680"/>
+            <a:ext cx="3291840" cy="3657600"/>
           </a:xfrm>
           <a:prstGeom prst="roundRect">
             <a:avLst>
@@ -6818,7 +6866,7 @@
         </p:blipFill>
         <p:spPr>
           <a:xfrm>
-            <a:off x="6766560" y="2116836"/>
+            <a:off x="6766560" y="2322576"/>
             <a:ext cx="457200" cy="457200"/>
           </a:xfrm>
           <a:prstGeom prst="rect">
@@ -6834,7 +6882,7 @@
         </p:nvSpPr>
         <p:spPr>
           <a:xfrm>
-            <a:off x="5440680" y="2610612"/>
+            <a:off x="5440680" y="2816352"/>
             <a:ext cx="3108960" cy="256032"/>
           </a:xfrm>
           <a:prstGeom prst="rect">
@@ -7121,8 +7169,8 @@
         </p:nvSpPr>
         <p:spPr>
           <a:xfrm>
-            <a:off x="5349240" y="457200"/>
-            <a:ext cx="3291840" cy="4069080"/>
+            <a:off x="5349240" y="868680"/>
+            <a:ext cx="3291840" cy="3657600"/>
           </a:xfrm>
           <a:prstGeom prst="roundRect">
             <a:avLst>
@@ -7156,7 +7204,7 @@
         </p:blipFill>
         <p:spPr>
           <a:xfrm>
-            <a:off x="6766560" y="2116836"/>
+            <a:off x="6766560" y="2322576"/>
             <a:ext cx="457200" cy="457200"/>
           </a:xfrm>
           <a:prstGeom prst="rect">
@@ -7172,7 +7220,7 @@
         </p:nvSpPr>
         <p:spPr>
           <a:xfrm>
-            <a:off x="5440680" y="2610612"/>
+            <a:off x="5440680" y="2816352"/>
             <a:ext cx="3108960" cy="256032"/>
           </a:xfrm>
           <a:prstGeom prst="rect">
@@ -7459,8 +7507,8 @@
         </p:nvSpPr>
         <p:spPr>
           <a:xfrm>
-            <a:off x="5349240" y="457200"/>
-            <a:ext cx="3291840" cy="4069080"/>
+            <a:off x="5349240" y="868680"/>
+            <a:ext cx="3291840" cy="3657600"/>
           </a:xfrm>
           <a:prstGeom prst="roundRect">
             <a:avLst>
@@ -7494,7 +7542,7 @@
         </p:blipFill>
         <p:spPr>
           <a:xfrm>
-            <a:off x="6766560" y="2116836"/>
+            <a:off x="6766560" y="2322576"/>
             <a:ext cx="457200" cy="457200"/>
           </a:xfrm>
           <a:prstGeom prst="rect">
@@ -7510,7 +7558,7 @@
         </p:nvSpPr>
         <p:spPr>
           <a:xfrm>
-            <a:off x="5440680" y="2610612"/>
+            <a:off x="5440680" y="2816352"/>
             <a:ext cx="3108960" cy="256032"/>
           </a:xfrm>
           <a:prstGeom prst="rect">
@@ -8245,8 +8293,8 @@
         </p:nvSpPr>
         <p:spPr>
           <a:xfrm>
-            <a:off x="5852160" y="365760"/>
-            <a:ext cx="2834640" cy="4480560"/>
+            <a:off x="5852160" y="868680"/>
+            <a:ext cx="2834640" cy="3931920"/>
           </a:xfrm>
           <a:prstGeom prst="roundRect">
             <a:avLst>
@@ -8280,7 +8328,7 @@
         </p:blipFill>
         <p:spPr>
           <a:xfrm>
-            <a:off x="7040880" y="2231136"/>
+            <a:off x="7040880" y="2459736"/>
             <a:ext cx="457200" cy="457200"/>
           </a:xfrm>
           <a:prstGeom prst="rect">
@@ -8296,7 +8344,7 @@
         </p:nvSpPr>
         <p:spPr>
           <a:xfrm>
-            <a:off x="5943600" y="2724912"/>
+            <a:off x="5943600" y="2953512"/>
             <a:ext cx="2651760" cy="256032"/>
           </a:xfrm>
           <a:prstGeom prst="rect">
@@ -8583,8 +8631,8 @@
         </p:nvSpPr>
         <p:spPr>
           <a:xfrm>
-            <a:off x="5349240" y="457200"/>
-            <a:ext cx="3291840" cy="4069080"/>
+            <a:off x="5349240" y="868680"/>
+            <a:ext cx="3291840" cy="3657600"/>
           </a:xfrm>
           <a:prstGeom prst="roundRect">
             <a:avLst>
@@ -8618,7 +8666,7 @@
         </p:blipFill>
         <p:spPr>
           <a:xfrm>
-            <a:off x="6766560" y="2116836"/>
+            <a:off x="6766560" y="2322576"/>
             <a:ext cx="457200" cy="457200"/>
           </a:xfrm>
           <a:prstGeom prst="rect">
@@ -8634,7 +8682,7 @@
         </p:nvSpPr>
         <p:spPr>
           <a:xfrm>
-            <a:off x="5440680" y="2610612"/>
+            <a:off x="5440680" y="2816352"/>
             <a:ext cx="3108960" cy="256032"/>
           </a:xfrm>
           <a:prstGeom prst="rect">
@@ -9369,8 +9417,8 @@
         </p:nvSpPr>
         <p:spPr>
           <a:xfrm>
-            <a:off x="5852160" y="365760"/>
-            <a:ext cx="2834640" cy="4480560"/>
+            <a:off x="5852160" y="868680"/>
+            <a:ext cx="2834640" cy="3931920"/>
           </a:xfrm>
           <a:prstGeom prst="roundRect">
             <a:avLst>
@@ -9404,7 +9452,7 @@
         </p:blipFill>
         <p:spPr>
           <a:xfrm>
-            <a:off x="7040880" y="2231136"/>
+            <a:off x="7040880" y="2459736"/>
             <a:ext cx="457200" cy="457200"/>
           </a:xfrm>
           <a:prstGeom prst="rect">
@@ -9420,7 +9468,7 @@
         </p:nvSpPr>
         <p:spPr>
           <a:xfrm>
-            <a:off x="5943600" y="2724912"/>
+            <a:off x="5943600" y="2953512"/>
             <a:ext cx="2651760" cy="256032"/>
           </a:xfrm>
           <a:prstGeom prst="rect">
@@ -10066,8 +10114,8 @@
         </p:nvSpPr>
         <p:spPr>
           <a:xfrm>
-            <a:off x="5852160" y="365760"/>
-            <a:ext cx="2834640" cy="4480560"/>
+            <a:off x="5852160" y="868680"/>
+            <a:ext cx="2834640" cy="3931920"/>
           </a:xfrm>
           <a:prstGeom prst="roundRect">
             <a:avLst>
@@ -10101,7 +10149,7 @@
         </p:blipFill>
         <p:spPr>
           <a:xfrm>
-            <a:off x="7040880" y="2231136"/>
+            <a:off x="7040880" y="2459736"/>
             <a:ext cx="457200" cy="457200"/>
           </a:xfrm>
           <a:prstGeom prst="rect">
@@ -10117,7 +10165,7 @@
         </p:nvSpPr>
         <p:spPr>
           <a:xfrm>
-            <a:off x="5943600" y="2724912"/>
+            <a:off x="5943600" y="2953512"/>
             <a:ext cx="2651760" cy="256032"/>
           </a:xfrm>
           <a:prstGeom prst="rect">
@@ -10763,8 +10811,8 @@
         </p:nvSpPr>
         <p:spPr>
           <a:xfrm>
-            <a:off x="5852160" y="365760"/>
-            <a:ext cx="2834640" cy="4480560"/>
+            <a:off x="5852160" y="868680"/>
+            <a:ext cx="2834640" cy="3931920"/>
           </a:xfrm>
           <a:prstGeom prst="roundRect">
             <a:avLst>
@@ -10798,7 +10846,7 @@
         </p:blipFill>
         <p:spPr>
           <a:xfrm>
-            <a:off x="7040880" y="2231136"/>
+            <a:off x="7040880" y="2459736"/>
             <a:ext cx="457200" cy="457200"/>
           </a:xfrm>
           <a:prstGeom prst="rect">
@@ -10814,7 +10862,7 @@
         </p:nvSpPr>
         <p:spPr>
           <a:xfrm>
-            <a:off x="5943600" y="2724912"/>
+            <a:off x="5943600" y="2953512"/>
             <a:ext cx="2651760" cy="256032"/>
           </a:xfrm>
           <a:prstGeom prst="rect">
@@ -11474,8 +11522,8 @@
         </p:nvSpPr>
         <p:spPr>
           <a:xfrm>
-            <a:off x="5852160" y="365760"/>
-            <a:ext cx="2834640" cy="4480560"/>
+            <a:off x="5852160" y="868680"/>
+            <a:ext cx="2834640" cy="3931920"/>
           </a:xfrm>
           <a:prstGeom prst="roundRect">
             <a:avLst>
@@ -11509,7 +11557,7 @@
         </p:blipFill>
         <p:spPr>
           <a:xfrm>
-            <a:off x="7040880" y="2231136"/>
+            <a:off x="7040880" y="2459736"/>
             <a:ext cx="457200" cy="457200"/>
           </a:xfrm>
           <a:prstGeom prst="rect">
@@ -11525,7 +11573,7 @@
         </p:nvSpPr>
         <p:spPr>
           <a:xfrm>
-            <a:off x="5943600" y="2724912"/>
+            <a:off x="5943600" y="2953512"/>
             <a:ext cx="2651760" cy="256032"/>
           </a:xfrm>
           <a:prstGeom prst="rect">
@@ -11993,8 +12041,8 @@
         </p:nvSpPr>
         <p:spPr>
           <a:xfrm>
-            <a:off x="5852160" y="365760"/>
-            <a:ext cx="2834640" cy="4480560"/>
+            <a:off x="5852160" y="868680"/>
+            <a:ext cx="2834640" cy="3931920"/>
           </a:xfrm>
           <a:prstGeom prst="roundRect">
             <a:avLst>
@@ -12028,7 +12076,7 @@
         </p:blipFill>
         <p:spPr>
           <a:xfrm>
-            <a:off x="7040880" y="2231136"/>
+            <a:off x="7040880" y="2459736"/>
             <a:ext cx="457200" cy="457200"/>
           </a:xfrm>
           <a:prstGeom prst="rect">
@@ -12044,7 +12092,7 @@
         </p:nvSpPr>
         <p:spPr>
           <a:xfrm>
-            <a:off x="5943600" y="2724912"/>
+            <a:off x="5943600" y="2953512"/>
             <a:ext cx="2651760" cy="256032"/>
           </a:xfrm>
           <a:prstGeom prst="rect">
@@ -12601,8 +12649,8 @@
         </p:nvSpPr>
         <p:spPr>
           <a:xfrm>
-            <a:off x="5852160" y="365760"/>
-            <a:ext cx="2834640" cy="4480560"/>
+            <a:off x="5852160" y="868680"/>
+            <a:ext cx="2834640" cy="3931920"/>
           </a:xfrm>
           <a:prstGeom prst="roundRect">
             <a:avLst>
@@ -12636,7 +12684,7 @@
         </p:blipFill>
         <p:spPr>
           <a:xfrm>
-            <a:off x="7040880" y="2231136"/>
+            <a:off x="7040880" y="2459736"/>
             <a:ext cx="457200" cy="457200"/>
           </a:xfrm>
           <a:prstGeom prst="rect">
@@ -12652,7 +12700,7 @@
         </p:nvSpPr>
         <p:spPr>
           <a:xfrm>
-            <a:off x="5943600" y="2724912"/>
+            <a:off x="5943600" y="2953512"/>
             <a:ext cx="2651760" cy="256032"/>
           </a:xfrm>
           <a:prstGeom prst="rect">
@@ -13120,8 +13168,8 @@
         </p:nvSpPr>
         <p:spPr>
           <a:xfrm>
-            <a:off x="5852160" y="365760"/>
-            <a:ext cx="2834640" cy="4480560"/>
+            <a:off x="5852160" y="868680"/>
+            <a:ext cx="2834640" cy="3931920"/>
           </a:xfrm>
           <a:prstGeom prst="roundRect">
             <a:avLst>
@@ -13155,7 +13203,7 @@
         </p:blipFill>
         <p:spPr>
           <a:xfrm>
-            <a:off x="7040880" y="2231136"/>
+            <a:off x="7040880" y="2459736"/>
             <a:ext cx="457200" cy="457200"/>
           </a:xfrm>
           <a:prstGeom prst="rect">
@@ -13171,7 +13219,7 @@
         </p:nvSpPr>
         <p:spPr>
           <a:xfrm>
-            <a:off x="5943600" y="2724912"/>
+            <a:off x="5943600" y="2953512"/>
             <a:ext cx="2651760" cy="256032"/>
           </a:xfrm>
           <a:prstGeom prst="rect">
